--- a/prezentacie/t07w.pptx
+++ b/prezentacie/t07w.pptx
@@ -252,7 +252,7 @@
           <a:p>
             <a:fld id="{10052495-8BC8-4CFB-94B1-B0429F101A0D}" type="datetimeFigureOut">
               <a:rPr lang="sk-SK" smtClean="0"/>
-              <a:t>21. 10. 2025</a:t>
+              <a:t>17. 10. 2026</a:t>
             </a:fld>
             <a:endParaRPr lang="sk-SK"/>
           </a:p>
@@ -422,7 +422,7 @@
           <a:p>
             <a:fld id="{10052495-8BC8-4CFB-94B1-B0429F101A0D}" type="datetimeFigureOut">
               <a:rPr lang="sk-SK" smtClean="0"/>
-              <a:t>21. 10. 2025</a:t>
+              <a:t>17. 10. 2026</a:t>
             </a:fld>
             <a:endParaRPr lang="sk-SK"/>
           </a:p>
@@ -602,7 +602,7 @@
           <a:p>
             <a:fld id="{10052495-8BC8-4CFB-94B1-B0429F101A0D}" type="datetimeFigureOut">
               <a:rPr lang="sk-SK" smtClean="0"/>
-              <a:t>21. 10. 2025</a:t>
+              <a:t>17. 10. 2026</a:t>
             </a:fld>
             <a:endParaRPr lang="sk-SK"/>
           </a:p>
@@ -772,7 +772,7 @@
           <a:p>
             <a:fld id="{10052495-8BC8-4CFB-94B1-B0429F101A0D}" type="datetimeFigureOut">
               <a:rPr lang="sk-SK" smtClean="0"/>
-              <a:t>21. 10. 2025</a:t>
+              <a:t>17. 10. 2026</a:t>
             </a:fld>
             <a:endParaRPr lang="sk-SK"/>
           </a:p>
@@ -1018,7 +1018,7 @@
           <a:p>
             <a:fld id="{10052495-8BC8-4CFB-94B1-B0429F101A0D}" type="datetimeFigureOut">
               <a:rPr lang="sk-SK" smtClean="0"/>
-              <a:t>21. 10. 2025</a:t>
+              <a:t>17. 10. 2026</a:t>
             </a:fld>
             <a:endParaRPr lang="sk-SK"/>
           </a:p>
@@ -1250,7 +1250,7 @@
           <a:p>
             <a:fld id="{10052495-8BC8-4CFB-94B1-B0429F101A0D}" type="datetimeFigureOut">
               <a:rPr lang="sk-SK" smtClean="0"/>
-              <a:t>21. 10. 2025</a:t>
+              <a:t>17. 10. 2026</a:t>
             </a:fld>
             <a:endParaRPr lang="sk-SK"/>
           </a:p>
@@ -1617,7 +1617,7 @@
           <a:p>
             <a:fld id="{10052495-8BC8-4CFB-94B1-B0429F101A0D}" type="datetimeFigureOut">
               <a:rPr lang="sk-SK" smtClean="0"/>
-              <a:t>21. 10. 2025</a:t>
+              <a:t>17. 10. 2026</a:t>
             </a:fld>
             <a:endParaRPr lang="sk-SK"/>
           </a:p>
@@ -1735,7 +1735,7 @@
           <a:p>
             <a:fld id="{10052495-8BC8-4CFB-94B1-B0429F101A0D}" type="datetimeFigureOut">
               <a:rPr lang="sk-SK" smtClean="0"/>
-              <a:t>21. 10. 2025</a:t>
+              <a:t>17. 10. 2026</a:t>
             </a:fld>
             <a:endParaRPr lang="sk-SK"/>
           </a:p>
@@ -1830,7 +1830,7 @@
           <a:p>
             <a:fld id="{10052495-8BC8-4CFB-94B1-B0429F101A0D}" type="datetimeFigureOut">
               <a:rPr lang="sk-SK" smtClean="0"/>
-              <a:t>21. 10. 2025</a:t>
+              <a:t>17. 10. 2026</a:t>
             </a:fld>
             <a:endParaRPr lang="sk-SK"/>
           </a:p>
@@ -2107,7 +2107,7 @@
           <a:p>
             <a:fld id="{10052495-8BC8-4CFB-94B1-B0429F101A0D}" type="datetimeFigureOut">
               <a:rPr lang="sk-SK" smtClean="0"/>
-              <a:t>21. 10. 2025</a:t>
+              <a:t>17. 10. 2026</a:t>
             </a:fld>
             <a:endParaRPr lang="sk-SK"/>
           </a:p>
@@ -2364,7 +2364,7 @@
           <a:p>
             <a:fld id="{10052495-8BC8-4CFB-94B1-B0429F101A0D}" type="datetimeFigureOut">
               <a:rPr lang="sk-SK" smtClean="0"/>
-              <a:t>21. 10. 2025</a:t>
+              <a:t>17. 10. 2026</a:t>
             </a:fld>
             <a:endParaRPr lang="sk-SK"/>
           </a:p>
@@ -2577,7 +2577,7 @@
           <a:p>
             <a:fld id="{10052495-8BC8-4CFB-94B1-B0429F101A0D}" type="datetimeFigureOut">
               <a:rPr lang="sk-SK" smtClean="0"/>
-              <a:t>21. 10. 2025</a:t>
+              <a:t>17. 10. 2026</a:t>
             </a:fld>
             <a:endParaRPr lang="sk-SK"/>
           </a:p>
@@ -3503,7 +3503,15 @@
             </a:br>
             <a:r>
               <a:rPr lang="sk-SK" b="1" dirty="0"/>
-              <a:t>Ing. Jozef Wagner PhD.</a:t>
+              <a:t>Ing. Jozef Wagner</a:t>
+            </a:r>
+            <a:r>
+              <a:rPr lang="en-US" b="1" dirty="0"/>
+              <a:t>,</a:t>
+            </a:r>
+            <a:r>
+              <a:rPr lang="sk-SK" b="1" dirty="0"/>
+              <a:t> PhD.</a:t>
             </a:r>
           </a:p>
           <a:p>
@@ -4431,11 +4439,25 @@
           <a:lstStyle/>
           <a:p>
             <a:r>
-              <a:rPr lang="en-US" sz="4000" dirty="0" err="1"/>
+              <a:rPr lang="en-US" sz="4000" dirty="0" err="1">
+                <a:solidFill>
+                  <a:srgbClr val="FF0000"/>
+                </a:solidFill>
+                <a:highlight>
+                  <a:srgbClr val="00FFFF"/>
+                </a:highlight>
+              </a:rPr>
               <a:t>Statick</a:t>
             </a:r>
             <a:r>
-              <a:rPr lang="sk-SK" sz="4000" dirty="0"/>
+              <a:rPr lang="sk-SK" sz="4000" dirty="0">
+                <a:solidFill>
+                  <a:srgbClr val="FF0000"/>
+                </a:solidFill>
+                <a:highlight>
+                  <a:srgbClr val="00FFFF"/>
+                </a:highlight>
+              </a:rPr>
               <a:t>é metódy</a:t>
             </a:r>
           </a:p>
@@ -4476,7 +4498,14 @@
               <a:buNone/>
             </a:pPr>
             <a:r>
-              <a:rPr lang="pl-PL" dirty="0"/>
+              <a:rPr lang="pl-PL" dirty="0">
+                <a:solidFill>
+                  <a:srgbClr val="FF0000"/>
+                </a:solidFill>
+                <a:highlight>
+                  <a:srgbClr val="00FFFF"/>
+                </a:highlight>
+              </a:rPr>
               <a:t>Nepatria objektu ale triede ako takej</a:t>
             </a:r>
           </a:p>
@@ -4509,7 +4538,14 @@
               <a:buNone/>
             </a:pPr>
             <a:r>
-              <a:rPr lang="pl-PL" dirty="0"/>
+              <a:rPr lang="pl-PL" dirty="0">
+                <a:solidFill>
+                  <a:srgbClr val="FF0000"/>
+                </a:solidFill>
+                <a:highlight>
+                  <a:srgbClr val="00FFFF"/>
+                </a:highlight>
+              </a:rPr>
               <a:t>Využitie: utilitky, factory metódy a vstupný bod programu</a:t>
             </a:r>
           </a:p>
@@ -4725,10 +4761,24 @@
           <a:lstStyle/>
           <a:p>
             <a:r>
-              <a:rPr lang="sk-SK" dirty="0"/>
+              <a:rPr lang="sk-SK" dirty="0">
+                <a:solidFill>
+                  <a:srgbClr val="FF0000"/>
+                </a:solidFill>
+                <a:highlight>
+                  <a:srgbClr val="00FFFF"/>
+                </a:highlight>
+              </a:rPr>
               <a:t>Inštančné metódy</a:t>
             </a:r>
-            <a:endParaRPr lang="sk-SK" sz="4000" dirty="0"/>
+            <a:endParaRPr lang="sk-SK" sz="4000" dirty="0">
+              <a:solidFill>
+                <a:srgbClr val="FF0000"/>
+              </a:solidFill>
+              <a:highlight>
+                <a:srgbClr val="00FFFF"/>
+              </a:highlight>
+            </a:endParaRPr>
           </a:p>
         </p:txBody>
       </p:sp>
@@ -4767,11 +4817,21 @@
               <a:buNone/>
             </a:pPr>
             <a:r>
-              <a:rPr lang="sk-SK" dirty="0"/>
+              <a:rPr lang="sk-SK" dirty="0">
+                <a:solidFill>
+                  <a:srgbClr val="FF0000"/>
+                </a:solidFill>
+                <a:highlight>
+                  <a:srgbClr val="00FFFF"/>
+                </a:highlight>
+              </a:rPr>
               <a:t>Pracujú s objektom, volanie </a:t>
             </a:r>
             <a:r>
               <a:rPr lang="sk-SK" dirty="0" err="1">
+                <a:solidFill>
+                  <a:srgbClr val="FF0000"/>
+                </a:solidFill>
                 <a:highlight>
                   <a:srgbClr val="FFFF00"/>
                 </a:highlight>
@@ -4781,6 +4841,9 @@
             </a:r>
             <a:r>
               <a:rPr lang="sk-SK" dirty="0">
+                <a:solidFill>
+                  <a:srgbClr val="FF0000"/>
+                </a:solidFill>
                 <a:highlight>
                   <a:srgbClr val="FFFF00"/>
                 </a:highlight>
@@ -4797,7 +4860,14 @@
               <a:buNone/>
             </a:pPr>
             <a:r>
-              <a:rPr lang="sk-SK" dirty="0"/>
+              <a:rPr lang="sk-SK" dirty="0">
+                <a:solidFill>
+                  <a:srgbClr val="FF0000"/>
+                </a:solidFill>
+                <a:highlight>
+                  <a:srgbClr val="00FFFF"/>
+                </a:highlight>
+              </a:rPr>
               <a:t>Majú prístup k všetkým atribútom svojej triedy</a:t>
             </a:r>
           </a:p>
@@ -4809,11 +4879,21 @@
               <a:buNone/>
             </a:pPr>
             <a:r>
-              <a:rPr lang="sk-SK" dirty="0"/>
+              <a:rPr lang="sk-SK" dirty="0">
+                <a:solidFill>
+                  <a:srgbClr val="FF0000"/>
+                </a:solidFill>
+                <a:highlight>
+                  <a:srgbClr val="00FFFF"/>
+                </a:highlight>
+              </a:rPr>
               <a:t>Majú v sebe definovanú špeciálnu premennú </a:t>
             </a:r>
             <a:r>
               <a:rPr lang="sk-SK" dirty="0" err="1">
+                <a:solidFill>
+                  <a:srgbClr val="FF0000"/>
+                </a:solidFill>
                 <a:highlight>
                   <a:srgbClr val="FFFF00"/>
                 </a:highlight>
@@ -4822,7 +4902,14 @@
               <a:t>this</a:t>
             </a:r>
             <a:r>
-              <a:rPr lang="sk-SK" dirty="0"/>
+              <a:rPr lang="sk-SK" dirty="0">
+                <a:solidFill>
+                  <a:srgbClr val="FF0000"/>
+                </a:solidFill>
+                <a:highlight>
+                  <a:srgbClr val="00FFFF"/>
+                </a:highlight>
+              </a:rPr>
               <a:t>, pomocou ktorej pristupujeme k objektu</a:t>
             </a:r>
           </a:p>
@@ -5168,10 +5255,24 @@
           <a:lstStyle/>
           <a:p>
             <a:r>
-              <a:rPr lang="sk-SK" dirty="0"/>
+              <a:rPr lang="sk-SK" dirty="0">
+                <a:solidFill>
+                  <a:srgbClr val="FF0000"/>
+                </a:solidFill>
+                <a:highlight>
+                  <a:srgbClr val="00FFFF"/>
+                </a:highlight>
+              </a:rPr>
               <a:t>Špeciálne inštančné metódy</a:t>
             </a:r>
-            <a:endParaRPr lang="sk-SK" sz="4000" dirty="0"/>
+            <a:endParaRPr lang="sk-SK" sz="4000" dirty="0">
+              <a:solidFill>
+                <a:srgbClr val="FF0000"/>
+              </a:solidFill>
+              <a:highlight>
+                <a:srgbClr val="00FFFF"/>
+              </a:highlight>
+            </a:endParaRPr>
           </a:p>
         </p:txBody>
       </p:sp>
@@ -5211,6 +5312,9 @@
             </a:pPr>
             <a:r>
               <a:rPr lang="sk-SK" dirty="0" err="1">
+                <a:solidFill>
+                  <a:srgbClr val="FF0000"/>
+                </a:solidFill>
                 <a:highlight>
                   <a:srgbClr val="FFFF00"/>
                 </a:highlight>
@@ -5220,6 +5324,9 @@
             </a:r>
             <a:r>
               <a:rPr lang="sk-SK" dirty="0">
+                <a:solidFill>
+                  <a:srgbClr val="FF0000"/>
+                </a:solidFill>
                 <a:highlight>
                   <a:srgbClr val="FFFF00"/>
                 </a:highlight>
@@ -5228,7 +5335,14 @@
               <a:t>()</a:t>
             </a:r>
             <a:r>
-              <a:rPr lang="sk-SK" dirty="0"/>
+              <a:rPr lang="sk-SK" dirty="0">
+                <a:solidFill>
+                  <a:srgbClr val="FF0000"/>
+                </a:solidFill>
+                <a:highlight>
+                  <a:srgbClr val="00FFFF"/>
+                </a:highlight>
+              </a:rPr>
               <a:t> - sa zavolá, keď sa objekt prevádza na reťazec</a:t>
             </a:r>
           </a:p>
@@ -5380,6 +5494,9 @@
             </a:pPr>
             <a:r>
               <a:rPr lang="sk-SK" dirty="0" err="1">
+                <a:solidFill>
+                  <a:srgbClr val="FF0000"/>
+                </a:solidFill>
                 <a:highlight>
                   <a:srgbClr val="FFFF00"/>
                 </a:highlight>
@@ -5389,6 +5506,9 @@
             </a:r>
             <a:r>
               <a:rPr lang="sk-SK" dirty="0">
+                <a:solidFill>
+                  <a:srgbClr val="FF0000"/>
+                </a:solidFill>
                 <a:highlight>
                   <a:srgbClr val="FFFF00"/>
                 </a:highlight>
@@ -5397,7 +5517,14 @@
               <a:t>()</a:t>
             </a:r>
             <a:r>
-              <a:rPr lang="sk-SK" dirty="0"/>
+              <a:rPr lang="sk-SK" dirty="0">
+                <a:solidFill>
+                  <a:srgbClr val="FF0000"/>
+                </a:solidFill>
+                <a:highlight>
+                  <a:srgbClr val="00FFFF"/>
+                </a:highlight>
+              </a:rPr>
               <a:t> -  porovnanie dvoch objektov podľa hodnoty</a:t>
             </a:r>
           </a:p>
@@ -5650,10 +5777,24 @@
           <a:lstStyle/>
           <a:p>
             <a:r>
-              <a:rPr lang="sk-SK" dirty="0"/>
+              <a:rPr lang="sk-SK" dirty="0">
+                <a:solidFill>
+                  <a:srgbClr val="FF0000"/>
+                </a:solidFill>
+                <a:highlight>
+                  <a:srgbClr val="00FFFF"/>
+                </a:highlight>
+              </a:rPr>
               <a:t>Preťaženie metód</a:t>
             </a:r>
-            <a:endParaRPr lang="sk-SK" sz="4000" dirty="0"/>
+            <a:endParaRPr lang="sk-SK" sz="4000" dirty="0">
+              <a:solidFill>
+                <a:srgbClr val="FF0000"/>
+              </a:solidFill>
+              <a:highlight>
+                <a:srgbClr val="00FFFF"/>
+              </a:highlight>
+            </a:endParaRPr>
           </a:p>
         </p:txBody>
       </p:sp>
@@ -5692,7 +5833,14 @@
               <a:buNone/>
             </a:pPr>
             <a:r>
-              <a:rPr lang="sk-SK" dirty="0"/>
+              <a:rPr lang="sk-SK" dirty="0">
+                <a:solidFill>
+                  <a:srgbClr val="FF0000"/>
+                </a:solidFill>
+                <a:highlight>
+                  <a:srgbClr val="00FFFF"/>
+                </a:highlight>
+              </a:rPr>
               <a:t>Môžeme mať viacero metód s rovnakým menom</a:t>
             </a:r>
           </a:p>
@@ -5704,11 +5852,25 @@
               <a:buNone/>
             </a:pPr>
             <a:r>
-              <a:rPr lang="sk-SK" dirty="0"/>
+              <a:rPr lang="sk-SK" dirty="0">
+                <a:solidFill>
+                  <a:srgbClr val="FF0000"/>
+                </a:solidFill>
+                <a:highlight>
+                  <a:srgbClr val="00FFFF"/>
+                </a:highlight>
+              </a:rPr>
               <a:t>Preťažené metódy sa </a:t>
             </a:r>
             <a:r>
-              <a:rPr lang="sk-SK" b="1" dirty="0"/>
+              <a:rPr lang="sk-SK" b="1" dirty="0">
+                <a:solidFill>
+                  <a:srgbClr val="FF0000"/>
+                </a:solidFill>
+                <a:highlight>
+                  <a:srgbClr val="00FFFF"/>
+                </a:highlight>
+              </a:rPr>
               <a:t>musia vzájomne líšiť počtom argumentov alebo typmi argumentov</a:t>
             </a:r>
           </a:p>
@@ -5732,10 +5894,24 @@
               <a:t>, anglicky </a:t>
             </a:r>
             <a:r>
-              <a:rPr lang="sk-SK" b="1" dirty="0" err="1"/>
+              <a:rPr lang="sk-SK" b="1" dirty="0" err="1">
+                <a:solidFill>
+                  <a:srgbClr val="FF0000"/>
+                </a:solidFill>
+                <a:highlight>
+                  <a:srgbClr val="00FFFF"/>
+                </a:highlight>
+              </a:rPr>
               <a:t>overloading</a:t>
             </a:r>
-            <a:endParaRPr lang="sk-SK" b="1" dirty="0"/>
+            <a:endParaRPr lang="sk-SK" b="1" dirty="0">
+              <a:solidFill>
+                <a:srgbClr val="FF0000"/>
+              </a:solidFill>
+              <a:highlight>
+                <a:srgbClr val="00FFFF"/>
+              </a:highlight>
+            </a:endParaRPr>
           </a:p>
           <a:p>
             <a:pPr marL="0" indent="0">
@@ -6593,19 +6769,47 @@
           <a:lstStyle/>
           <a:p>
             <a:r>
-              <a:rPr lang="sk-SK" dirty="0" err="1"/>
+              <a:rPr lang="sk-SK" dirty="0" err="1">
+                <a:solidFill>
+                  <a:srgbClr val="FF0000"/>
+                </a:solidFill>
+                <a:highlight>
+                  <a:srgbClr val="00FFFF"/>
+                </a:highlight>
+              </a:rPr>
               <a:t>Getter</a:t>
             </a:r>
             <a:r>
-              <a:rPr lang="sk-SK" dirty="0"/>
+              <a:rPr lang="sk-SK" dirty="0">
+                <a:solidFill>
+                  <a:srgbClr val="FF0000"/>
+                </a:solidFill>
+                <a:highlight>
+                  <a:srgbClr val="00FFFF"/>
+                </a:highlight>
+              </a:rPr>
               <a:t> a </a:t>
             </a:r>
             <a:r>
-              <a:rPr lang="sk-SK" dirty="0" err="1"/>
+              <a:rPr lang="sk-SK" dirty="0" err="1">
+                <a:solidFill>
+                  <a:srgbClr val="FF0000"/>
+                </a:solidFill>
+                <a:highlight>
+                  <a:srgbClr val="00FFFF"/>
+                </a:highlight>
+              </a:rPr>
               <a:t>Setter</a:t>
             </a:r>
             <a:r>
-              <a:rPr lang="sk-SK" dirty="0"/>
+              <a:rPr lang="sk-SK" dirty="0">
+                <a:solidFill>
+                  <a:srgbClr val="FF0000"/>
+                </a:solidFill>
+                <a:highlight>
+                  <a:srgbClr val="00FFFF"/>
+                </a:highlight>
+              </a:rPr>
               <a:t> metódy</a:t>
             </a:r>
           </a:p>
@@ -6649,15 +6853,27 @@
               <a:buNone/>
             </a:pPr>
             <a:r>
-              <a:rPr lang="sk-SK" sz="3300" b="1" dirty="0" err="1"/>
+              <a:rPr lang="sk-SK" sz="3300" b="1" dirty="0" err="1">
+                <a:solidFill>
+                  <a:srgbClr val="FF0000"/>
+                </a:solidFill>
+              </a:rPr>
               <a:t>Getter</a:t>
             </a:r>
             <a:r>
-              <a:rPr lang="sk-SK" sz="3300" b="1" dirty="0"/>
+              <a:rPr lang="sk-SK" sz="3300" b="1" dirty="0">
+                <a:solidFill>
+                  <a:srgbClr val="FF0000"/>
+                </a:solidFill>
+              </a:rPr>
               <a:t> metódy </a:t>
             </a:r>
             <a:r>
-              <a:rPr lang="sk-SK" sz="3300" dirty="0"/>
+              <a:rPr lang="sk-SK" sz="3300" dirty="0">
+                <a:solidFill>
+                  <a:srgbClr val="FF0000"/>
+                </a:solidFill>
+              </a:rPr>
               <a:t>slúžia na zistenie hodnoty nejakého atribútu v objekte</a:t>
             </a:r>
           </a:p>
@@ -6672,15 +6888,27 @@
               <a:buNone/>
             </a:pPr>
             <a:r>
-              <a:rPr lang="sk-SK" sz="3300" b="1" dirty="0" err="1"/>
+              <a:rPr lang="sk-SK" sz="3300" b="1" dirty="0" err="1">
+                <a:solidFill>
+                  <a:srgbClr val="FF0000"/>
+                </a:solidFill>
+              </a:rPr>
               <a:t>Setter</a:t>
             </a:r>
             <a:r>
-              <a:rPr lang="sk-SK" sz="3300" b="1" dirty="0"/>
+              <a:rPr lang="sk-SK" sz="3300" b="1" dirty="0">
+                <a:solidFill>
+                  <a:srgbClr val="FF0000"/>
+                </a:solidFill>
+              </a:rPr>
               <a:t> metódy </a:t>
             </a:r>
             <a:r>
-              <a:rPr lang="sk-SK" sz="3300" dirty="0"/>
+              <a:rPr lang="sk-SK" sz="3300" dirty="0">
+                <a:solidFill>
+                  <a:srgbClr val="FF0000"/>
+                </a:solidFill>
+              </a:rPr>
               <a:t>slúžia na zmenu hodnoty v objekte</a:t>
             </a:r>
           </a:p>
@@ -7244,7 +7472,14 @@
           <a:lstStyle/>
           <a:p>
             <a:r>
-              <a:rPr lang="sk-SK" dirty="0"/>
+              <a:rPr lang="sk-SK" dirty="0">
+                <a:solidFill>
+                  <a:srgbClr val="FF0000"/>
+                </a:solidFill>
+                <a:highlight>
+                  <a:srgbClr val="00FFFF"/>
+                </a:highlight>
+              </a:rPr>
               <a:t>Továrenské metódy</a:t>
             </a:r>
           </a:p>
@@ -7292,19 +7527,44 @@
               <a:t>Anglicky </a:t>
             </a:r>
             <a:r>
-              <a:rPr lang="sk-SK" dirty="0" err="1"/>
+              <a:rPr lang="sk-SK" dirty="0" err="1">
+                <a:solidFill>
+                  <a:srgbClr val="FF0000"/>
+                </a:solidFill>
+                <a:highlight>
+                  <a:srgbClr val="00FFFF"/>
+                </a:highlight>
+              </a:rPr>
               <a:t>factory</a:t>
             </a:r>
             <a:r>
-              <a:rPr lang="sk-SK" dirty="0"/>
+              <a:rPr lang="sk-SK" dirty="0">
+                <a:solidFill>
+                  <a:srgbClr val="FF0000"/>
+                </a:solidFill>
+                <a:highlight>
+                  <a:srgbClr val="00FFFF"/>
+                </a:highlight>
+              </a:rPr>
               <a:t> </a:t>
             </a:r>
             <a:r>
-              <a:rPr lang="sk-SK" dirty="0" err="1"/>
+              <a:rPr lang="sk-SK" dirty="0" err="1">
+                <a:solidFill>
+                  <a:srgbClr val="FF0000"/>
+                </a:solidFill>
+                <a:highlight>
+                  <a:srgbClr val="00FFFF"/>
+                </a:highlight>
+              </a:rPr>
               <a:t>methods</a:t>
             </a:r>
             <a:r>
-              <a:rPr lang="sk-SK" dirty="0"/>
+              <a:rPr lang="sk-SK" dirty="0">
+                <a:solidFill>
+                  <a:srgbClr val="FF0000"/>
+                </a:solidFill>
+              </a:rPr>
               <a:t> </a:t>
             </a:r>
           </a:p>
@@ -7320,10 +7580,28 @@
             </a:pPr>
             <a:r>
               <a:rPr lang="sk-SK" dirty="0"/>
-              <a:t>Sú to statické metódy, ktoré </a:t>
-            </a:r>
-            <a:r>
-              <a:rPr lang="sk-SK" b="1" dirty="0"/>
+              <a:t>Sú to </a:t>
+            </a:r>
+            <a:r>
+              <a:rPr lang="sk-SK" dirty="0">
+                <a:solidFill>
+                  <a:srgbClr val="FF0000"/>
+                </a:solidFill>
+                <a:highlight>
+                  <a:srgbClr val="00FFFF"/>
+                </a:highlight>
+              </a:rPr>
+              <a:t>statické metódy, ktoré </a:t>
+            </a:r>
+            <a:r>
+              <a:rPr lang="sk-SK" b="1" dirty="0">
+                <a:solidFill>
+                  <a:srgbClr val="FF0000"/>
+                </a:solidFill>
+                <a:highlight>
+                  <a:srgbClr val="00FFFF"/>
+                </a:highlight>
+              </a:rPr>
               <a:t>vracajú inštanciu svojej triedy</a:t>
             </a:r>
           </a:p>
@@ -7339,7 +7617,18 @@
             </a:pPr>
             <a:r>
               <a:rPr lang="sk-SK" dirty="0"/>
-              <a:t>Továrenské metódy oddeľujú proces vytvárania objektov od kódu, ktorý ich používa</a:t>
+              <a:t>Továrenské metódy </a:t>
+            </a:r>
+            <a:r>
+              <a:rPr lang="sk-SK" dirty="0">
+                <a:solidFill>
+                  <a:srgbClr val="FF0000"/>
+                </a:solidFill>
+                <a:highlight>
+                  <a:srgbClr val="00FFFF"/>
+                </a:highlight>
+              </a:rPr>
+              <a:t>oddeľujú proces vytvárania objektov od kódu, ktorý ich používa</a:t>
             </a:r>
           </a:p>
           <a:p>
